--- a/Last/LEC/02-2_Decomposition.pptx
+++ b/Last/LEC/02-2_Decomposition.pptx
@@ -230,7 +230,7 @@
           <a:p>
             <a:fld id="{C730246F-5962-E14A-AAF2-985CCFDAC345}" type="datetimeFigureOut">
               <a:rPr lang="ru-RU" smtClean="0"/>
-              <a:t>04.05.2026</a:t>
+              <a:t>05.10.2026</a:t>
             </a:fld>
             <a:endParaRPr lang="ru-RU"/>
           </a:p>
@@ -838,7 +838,7 @@
           <a:p>
             <a:fld id="{44343DC6-30E4-4569-999A-C703F926F2AF}" type="datetimeFigureOut">
               <a:rPr lang="en-US" smtClean="0"/>
-              <a:t>5/4/2026</a:t>
+              <a:t>10/5/2026</a:t>
             </a:fld>
             <a:endParaRPr lang="en-US"/>
           </a:p>
@@ -1038,7 +1038,7 @@
           <a:p>
             <a:fld id="{44343DC6-30E4-4569-999A-C703F926F2AF}" type="datetimeFigureOut">
               <a:rPr lang="en-US" smtClean="0"/>
-              <a:t>5/4/2026</a:t>
+              <a:t>10/5/2026</a:t>
             </a:fld>
             <a:endParaRPr lang="en-US"/>
           </a:p>
@@ -1248,7 +1248,7 @@
           <a:p>
             <a:fld id="{44343DC6-30E4-4569-999A-C703F926F2AF}" type="datetimeFigureOut">
               <a:rPr lang="en-US" smtClean="0"/>
-              <a:t>5/4/2026</a:t>
+              <a:t>10/5/2026</a:t>
             </a:fld>
             <a:endParaRPr lang="en-US"/>
           </a:p>
@@ -1448,7 +1448,7 @@
           <a:p>
             <a:fld id="{44343DC6-30E4-4569-999A-C703F926F2AF}" type="datetimeFigureOut">
               <a:rPr lang="en-US" smtClean="0"/>
-              <a:t>5/4/2026</a:t>
+              <a:t>10/5/2026</a:t>
             </a:fld>
             <a:endParaRPr lang="en-US"/>
           </a:p>
@@ -1724,7 +1724,7 @@
           <a:p>
             <a:fld id="{44343DC6-30E4-4569-999A-C703F926F2AF}" type="datetimeFigureOut">
               <a:rPr lang="en-US" smtClean="0"/>
-              <a:t>5/4/2026</a:t>
+              <a:t>10/5/2026</a:t>
             </a:fld>
             <a:endParaRPr lang="en-US"/>
           </a:p>
@@ -1992,7 +1992,7 @@
           <a:p>
             <a:fld id="{44343DC6-30E4-4569-999A-C703F926F2AF}" type="datetimeFigureOut">
               <a:rPr lang="en-US" smtClean="0"/>
-              <a:t>5/4/2026</a:t>
+              <a:t>10/5/2026</a:t>
             </a:fld>
             <a:endParaRPr lang="en-US"/>
           </a:p>
@@ -2407,7 +2407,7 @@
           <a:p>
             <a:fld id="{44343DC6-30E4-4569-999A-C703F926F2AF}" type="datetimeFigureOut">
               <a:rPr lang="en-US" smtClean="0"/>
-              <a:t>5/4/2026</a:t>
+              <a:t>10/5/2026</a:t>
             </a:fld>
             <a:endParaRPr lang="en-US"/>
           </a:p>
@@ -2549,7 +2549,7 @@
           <a:p>
             <a:fld id="{44343DC6-30E4-4569-999A-C703F926F2AF}" type="datetimeFigureOut">
               <a:rPr lang="en-US" smtClean="0"/>
-              <a:t>5/4/2026</a:t>
+              <a:t>10/5/2026</a:t>
             </a:fld>
             <a:endParaRPr lang="en-US"/>
           </a:p>
@@ -2662,7 +2662,7 @@
           <a:p>
             <a:fld id="{44343DC6-30E4-4569-999A-C703F926F2AF}" type="datetimeFigureOut">
               <a:rPr lang="en-US" smtClean="0"/>
-              <a:t>5/4/2026</a:t>
+              <a:t>10/5/2026</a:t>
             </a:fld>
             <a:endParaRPr lang="en-US"/>
           </a:p>
@@ -2975,7 +2975,7 @@
           <a:p>
             <a:fld id="{44343DC6-30E4-4569-999A-C703F926F2AF}" type="datetimeFigureOut">
               <a:rPr lang="en-US" smtClean="0"/>
-              <a:t>5/4/2026</a:t>
+              <a:t>10/5/2026</a:t>
             </a:fld>
             <a:endParaRPr lang="en-US"/>
           </a:p>
@@ -3264,7 +3264,7 @@
           <a:p>
             <a:fld id="{44343DC6-30E4-4569-999A-C703F926F2AF}" type="datetimeFigureOut">
               <a:rPr lang="en-US" smtClean="0"/>
-              <a:t>5/4/2026</a:t>
+              <a:t>10/5/2026</a:t>
             </a:fld>
             <a:endParaRPr lang="en-US"/>
           </a:p>
@@ -3507,7 +3507,7 @@
           <a:p>
             <a:fld id="{44343DC6-30E4-4569-999A-C703F926F2AF}" type="datetimeFigureOut">
               <a:rPr lang="en-US" smtClean="0"/>
-              <a:t>5/4/2026</a:t>
+              <a:t>10/5/2026</a:t>
             </a:fld>
             <a:endParaRPr lang="en-US"/>
           </a:p>
@@ -3954,11 +3954,7 @@
           <a:p>
             <a:r>
               <a:rPr lang="ru-RU" sz="8000" b="1" dirty="0" smtClean="0"/>
-              <a:t>Разложение </a:t>
-            </a:r>
-            <a:r>
-              <a:rPr lang="ru-RU" sz="8000" b="1" dirty="0" smtClean="0"/>
-              <a:t>ВР</a:t>
+              <a:t>Разложение ВР</a:t>
             </a:r>
             <a:endParaRPr lang="en-US" sz="8000" b="1" dirty="0"/>
           </a:p>
@@ -5559,8 +5555,12 @@
               <a:t>Также некоторые методы предсказания предоставляют результаты внутренней декомпозиции ВР </a:t>
             </a:r>
             <a:r>
+              <a:rPr lang="en-US" sz="2200" dirty="0" smtClean="0"/>
+              <a:t>(GAR, TBATS</a:t>
+            </a:r>
+            <a:r>
               <a:rPr lang="en-US" sz="2200" dirty="0"/>
-              <a:t>(Prophet, TBATS, </a:t>
+              <a:t>, </a:t>
             </a:r>
             <a:r>
               <a:rPr lang="ru-RU" sz="2200" dirty="0"/>
